--- a/data-eng/decks/w4d3s1.pptx
+++ b/data-eng/decks/w4d3s1.pptx
@@ -3100,7 +3100,7 @@
       <p:grpSpPr/>
       <p:sp>
         <p:nvSpPr>
-          <p:cNvPr id="2" name="Oval 1"/>
+          <p:cNvPr id="2" name="deckgen:decor"/>
           <p:cNvSpPr/>
           <p:nvPr/>
         </p:nvSpPr>
@@ -3130,7 +3130,7 @@
       </p:sp>
       <p:sp>
         <p:nvSpPr>
-          <p:cNvPr id="3" name="Oval 2"/>
+          <p:cNvPr id="3" name="deckgen:decor"/>
           <p:cNvSpPr/>
           <p:nvPr/>
         </p:nvSpPr>
@@ -3160,7 +3160,7 @@
       </p:sp>
       <p:sp>
         <p:nvSpPr>
-          <p:cNvPr id="4" name="Oval 3"/>
+          <p:cNvPr id="4" name="deckgen:decor"/>
           <p:cNvSpPr/>
           <p:nvPr/>
         </p:nvSpPr>
@@ -3190,7 +3190,7 @@
       </p:sp>
       <p:sp>
         <p:nvSpPr>
-          <p:cNvPr id="5" name="Rectangle 4"/>
+          <p:cNvPr id="5" name="deckgen:decor"/>
           <p:cNvSpPr/>
           <p:nvPr/>
         </p:nvSpPr>
@@ -3220,7 +3220,7 @@
       </p:sp>
       <p:sp>
         <p:nvSpPr>
-          <p:cNvPr id="6" name="Oval 5"/>
+          <p:cNvPr id="6" name="deckgen:decor"/>
           <p:cNvSpPr/>
           <p:nvPr/>
         </p:nvSpPr>
@@ -3250,7 +3250,7 @@
       </p:sp>
       <p:sp>
         <p:nvSpPr>
-          <p:cNvPr id="7" name="Oval 6"/>
+          <p:cNvPr id="7" name="deckgen:decor"/>
           <p:cNvSpPr/>
           <p:nvPr/>
         </p:nvSpPr>
@@ -3280,7 +3280,7 @@
       </p:sp>
       <p:sp>
         <p:nvSpPr>
-          <p:cNvPr id="8" name="Oval 7"/>
+          <p:cNvPr id="8" name="deckgen:decor"/>
           <p:cNvSpPr/>
           <p:nvPr/>
         </p:nvSpPr>
@@ -3310,7 +3310,7 @@
       </p:sp>
       <p:sp>
         <p:nvSpPr>
-          <p:cNvPr id="9" name="Oval 8"/>
+          <p:cNvPr id="9" name="deckgen:decor"/>
           <p:cNvSpPr/>
           <p:nvPr/>
         </p:nvSpPr>
@@ -3340,7 +3340,7 @@
       </p:sp>
       <p:sp>
         <p:nvSpPr>
-          <p:cNvPr id="10" name="Rectangle 9"/>
+          <p:cNvPr id="10" name="deckgen:decor"/>
           <p:cNvSpPr/>
           <p:nvPr/>
         </p:nvSpPr>
@@ -3600,7 +3600,7 @@
       <p:grpSpPr/>
       <p:sp>
         <p:nvSpPr>
-          <p:cNvPr id="2" name="Oval 1"/>
+          <p:cNvPr id="2" name="deckgen:decor"/>
           <p:cNvSpPr/>
           <p:nvPr/>
         </p:nvSpPr>
@@ -3630,7 +3630,7 @@
       </p:sp>
       <p:sp>
         <p:nvSpPr>
-          <p:cNvPr id="3" name="Oval 2"/>
+          <p:cNvPr id="3" name="deckgen:decor"/>
           <p:cNvSpPr/>
           <p:nvPr/>
         </p:nvSpPr>
@@ -3660,7 +3660,7 @@
       </p:sp>
       <p:sp>
         <p:nvSpPr>
-          <p:cNvPr id="4" name="Oval 3"/>
+          <p:cNvPr id="4" name="deckgen:decor"/>
           <p:cNvSpPr/>
           <p:nvPr/>
         </p:nvSpPr>
@@ -4662,7 +4662,7 @@
       <p:grpSpPr/>
       <p:sp>
         <p:nvSpPr>
-          <p:cNvPr id="2" name="Oval 1"/>
+          <p:cNvPr id="2" name="deckgen:decor"/>
           <p:cNvSpPr/>
           <p:nvPr/>
         </p:nvSpPr>
@@ -4692,7 +4692,7 @@
       </p:sp>
       <p:sp>
         <p:nvSpPr>
-          <p:cNvPr id="3" name="Oval 2"/>
+          <p:cNvPr id="3" name="deckgen:decor"/>
           <p:cNvSpPr/>
           <p:nvPr/>
         </p:nvSpPr>
@@ -5216,7 +5216,7 @@
                 <a:ea typeface="Pretendard"/>
                 <a:cs typeface="Pretendard"/>
               </a:rPr>
-              <a:t>spark-shell 에 s3a --conf 네 개</a:t>
+              <a:t>spark-shell 에 --packages 와 --conf 네 개</a:t>
             </a:r>
           </a:p>
         </p:txBody>
@@ -5469,7 +5469,7 @@
       <p:grpSpPr/>
       <p:sp>
         <p:nvSpPr>
-          <p:cNvPr id="2" name="Oval 1"/>
+          <p:cNvPr id="2" name="deckgen:decor"/>
           <p:cNvSpPr/>
           <p:nvPr/>
         </p:nvSpPr>
@@ -5499,7 +5499,7 @@
       </p:sp>
       <p:sp>
         <p:nvSpPr>
-          <p:cNvPr id="3" name="Oval 2"/>
+          <p:cNvPr id="3" name="deckgen:decor"/>
           <p:cNvSpPr/>
           <p:nvPr/>
         </p:nvSpPr>
@@ -5529,7 +5529,7 @@
       </p:sp>
       <p:sp>
         <p:nvSpPr>
-          <p:cNvPr id="4" name="Oval 3"/>
+          <p:cNvPr id="4" name="deckgen:decor"/>
           <p:cNvSpPr/>
           <p:nvPr/>
         </p:nvSpPr>
@@ -6460,7 +6460,7 @@
       <p:grpSpPr/>
       <p:sp>
         <p:nvSpPr>
-          <p:cNvPr id="2" name="Oval 1"/>
+          <p:cNvPr id="2" name="deckgen:decor"/>
           <p:cNvSpPr/>
           <p:nvPr/>
         </p:nvSpPr>
@@ -6490,7 +6490,7 @@
       </p:sp>
       <p:sp>
         <p:nvSpPr>
-          <p:cNvPr id="3" name="Oval 2"/>
+          <p:cNvPr id="3" name="deckgen:decor"/>
           <p:cNvSpPr/>
           <p:nvPr/>
         </p:nvSpPr>
@@ -6520,7 +6520,7 @@
       </p:sp>
       <p:sp>
         <p:nvSpPr>
-          <p:cNvPr id="4" name="Oval 3"/>
+          <p:cNvPr id="4" name="deckgen:decor"/>
           <p:cNvSpPr/>
           <p:nvPr/>
         </p:nvSpPr>
@@ -7460,7 +7460,7 @@
       <p:grpSpPr/>
       <p:sp>
         <p:nvSpPr>
-          <p:cNvPr id="2" name="Oval 1"/>
+          <p:cNvPr id="2" name="deckgen:decor"/>
           <p:cNvSpPr/>
           <p:nvPr/>
         </p:nvSpPr>
@@ -7490,7 +7490,7 @@
       </p:sp>
       <p:sp>
         <p:nvSpPr>
-          <p:cNvPr id="3" name="Oval 2"/>
+          <p:cNvPr id="3" name="deckgen:decor"/>
           <p:cNvSpPr/>
           <p:nvPr/>
         </p:nvSpPr>
@@ -7520,7 +7520,7 @@
       </p:sp>
       <p:sp>
         <p:nvSpPr>
-          <p:cNvPr id="4" name="Oval 3"/>
+          <p:cNvPr id="4" name="deckgen:decor"/>
           <p:cNvSpPr/>
           <p:nvPr/>
         </p:nvSpPr>
@@ -9017,7 +9017,7 @@
       <p:grpSpPr/>
       <p:sp>
         <p:nvSpPr>
-          <p:cNvPr id="2" name="Oval 1"/>
+          <p:cNvPr id="2" name="deckgen:decor"/>
           <p:cNvSpPr/>
           <p:nvPr/>
         </p:nvSpPr>
@@ -9047,7 +9047,7 @@
       </p:sp>
       <p:sp>
         <p:nvSpPr>
-          <p:cNvPr id="3" name="Oval 2"/>
+          <p:cNvPr id="3" name="deckgen:decor"/>
           <p:cNvSpPr/>
           <p:nvPr/>
         </p:nvSpPr>
@@ -9077,7 +9077,7 @@
       </p:sp>
       <p:sp>
         <p:nvSpPr>
-          <p:cNvPr id="4" name="Oval 3"/>
+          <p:cNvPr id="4" name="deckgen:decor"/>
           <p:cNvSpPr/>
           <p:nvPr/>
         </p:nvSpPr>
@@ -10137,7 +10137,7 @@
       <p:grpSpPr/>
       <p:sp>
         <p:nvSpPr>
-          <p:cNvPr id="2" name="Oval 1"/>
+          <p:cNvPr id="2" name="deckgen:decor"/>
           <p:cNvSpPr/>
           <p:nvPr/>
         </p:nvSpPr>
@@ -10167,7 +10167,7 @@
       </p:sp>
       <p:sp>
         <p:nvSpPr>
-          <p:cNvPr id="3" name="Oval 2"/>
+          <p:cNvPr id="3" name="deckgen:decor"/>
           <p:cNvSpPr/>
           <p:nvPr/>
         </p:nvSpPr>
@@ -10197,7 +10197,7 @@
       </p:sp>
       <p:sp>
         <p:nvSpPr>
-          <p:cNvPr id="4" name="Oval 3"/>
+          <p:cNvPr id="4" name="deckgen:decor"/>
           <p:cNvSpPr/>
           <p:nvPr/>
         </p:nvSpPr>
@@ -11664,7 +11664,7 @@
       <p:grpSpPr/>
       <p:sp>
         <p:nvSpPr>
-          <p:cNvPr id="2" name="Oval 1"/>
+          <p:cNvPr id="2" name="deckgen:decor"/>
           <p:cNvSpPr/>
           <p:nvPr/>
         </p:nvSpPr>
@@ -11694,7 +11694,7 @@
       </p:sp>
       <p:sp>
         <p:nvSpPr>
-          <p:cNvPr id="3" name="Oval 2"/>
+          <p:cNvPr id="3" name="deckgen:decor"/>
           <p:cNvSpPr/>
           <p:nvPr/>
         </p:nvSpPr>
@@ -11724,7 +11724,7 @@
       </p:sp>
       <p:sp>
         <p:nvSpPr>
-          <p:cNvPr id="4" name="Oval 3"/>
+          <p:cNvPr id="4" name="deckgen:decor"/>
           <p:cNvSpPr/>
           <p:nvPr/>
         </p:nvSpPr>
@@ -12567,6 +12567,77 @@
         </p:nvSpPr>
         <p:spPr>
           <a:xfrm>
+            <a:off x="1143000" y="7581900"/>
+            <a:ext cx="38100" cy="323850"/>
+          </a:xfrm>
+          <a:prstGeom prst="rect">
+            <a:avLst/>
+          </a:prstGeom>
+          <a:solidFill>
+            <a:srgbClr val="BFD3F5"/>
+          </a:solidFill>
+          <a:ln>
+            <a:noFill/>
+          </a:ln>
+          <a:effectLst/>
+        </p:spPr>
+        <p:txBody>
+          <a:bodyPr rtlCol="0" anchor="ctr" wrap="square"/>
+          <a:lstStyle/>
+          <a:p>
+            <a:pPr algn="ctr"/>
+          </a:p>
+        </p:txBody>
+      </p:sp>
+      <p:sp>
+        <p:nvSpPr>
+          <p:cNvPr id="27" name="TextBox 26"/>
+          <p:cNvSpPr txBox="1"/>
+          <p:nvPr/>
+        </p:nvSpPr>
+        <p:spPr>
+          <a:xfrm>
+            <a:off x="1314450" y="7581900"/>
+            <a:ext cx="15830550" cy="342900"/>
+          </a:xfrm>
+          <a:prstGeom prst="rect">
+            <a:avLst/>
+          </a:prstGeom>
+          <a:noFill/>
+        </p:spPr>
+        <p:txBody>
+          <a:bodyPr wrap="square" lIns="0" rIns="0" tIns="0" bIns="0" anchor="t">
+            <a:spAutoFit/>
+          </a:bodyPr>
+          <a:lstStyle/>
+          <a:p>
+            <a:pPr algn="l">
+              <a:lnSpc>
+                <a:spcPct val="100000"/>
+              </a:lnSpc>
+            </a:pPr>
+            <a:r>
+              <a:rPr sz="1725" b="1">
+                <a:solidFill>
+                  <a:srgbClr val="7D7D7D"/>
+                </a:solidFill>
+                <a:latin typeface="Pretendard"/>
+                <a:ea typeface="Pretendard"/>
+                <a:cs typeface="Pretendard"/>
+              </a:rPr>
+              <a:t>[MERGE_CARDINALITY_VIOLATION] … matched a single row from the target table with multiple rows of the source table</a:t>
+            </a:r>
+          </a:p>
+        </p:txBody>
+      </p:sp>
+      <p:sp>
+        <p:nvSpPr>
+          <p:cNvPr id="28" name="Rectangle 27"/>
+          <p:cNvSpPr/>
+          <p:nvPr/>
+        </p:nvSpPr>
+        <p:spPr>
+          <a:xfrm>
             <a:off x="1143000" y="8058150"/>
             <a:ext cx="16002000" cy="9525"/>
           </a:xfrm>
@@ -12591,7 +12662,7 @@
       </p:sp>
       <p:sp>
         <p:nvSpPr>
-          <p:cNvPr id="27" name="TextBox 26"/>
+          <p:cNvPr id="29" name="TextBox 28"/>
           <p:cNvSpPr txBox="1"/>
           <p:nvPr/>
         </p:nvSpPr>
@@ -12632,7 +12703,7 @@
       </p:sp>
       <p:sp>
         <p:nvSpPr>
-          <p:cNvPr id="28" name="TextBox 27"/>
+          <p:cNvPr id="30" name="TextBox 29"/>
           <p:cNvSpPr txBox="1"/>
           <p:nvPr/>
         </p:nvSpPr>
@@ -12691,7 +12762,7 @@
       <p:grpSpPr/>
       <p:sp>
         <p:nvSpPr>
-          <p:cNvPr id="2" name="Oval 1"/>
+          <p:cNvPr id="2" name="deckgen:decor"/>
           <p:cNvSpPr/>
           <p:nvPr/>
         </p:nvSpPr>
@@ -12721,7 +12792,7 @@
       </p:sp>
       <p:sp>
         <p:nvSpPr>
-          <p:cNvPr id="3" name="Oval 2"/>
+          <p:cNvPr id="3" name="deckgen:decor"/>
           <p:cNvSpPr/>
           <p:nvPr/>
         </p:nvSpPr>
@@ -12751,7 +12822,7 @@
       </p:sp>
       <p:sp>
         <p:nvSpPr>
-          <p:cNvPr id="4" name="Oval 3"/>
+          <p:cNvPr id="4" name="deckgen:decor"/>
           <p:cNvSpPr/>
           <p:nvPr/>
         </p:nvSpPr>
@@ -13752,7 +13823,7 @@
       <p:grpSpPr/>
       <p:sp>
         <p:nvSpPr>
-          <p:cNvPr id="2" name="Oval 1"/>
+          <p:cNvPr id="2" name="deckgen:decor"/>
           <p:cNvSpPr/>
           <p:nvPr/>
         </p:nvSpPr>
@@ -13782,7 +13853,7 @@
       </p:sp>
       <p:sp>
         <p:nvSpPr>
-          <p:cNvPr id="3" name="Oval 2"/>
+          <p:cNvPr id="3" name="deckgen:decor"/>
           <p:cNvSpPr/>
           <p:nvPr/>
         </p:nvSpPr>
@@ -13812,7 +13883,7 @@
       </p:sp>
       <p:sp>
         <p:nvSpPr>
-          <p:cNvPr id="4" name="Oval 3"/>
+          <p:cNvPr id="4" name="deckgen:decor"/>
           <p:cNvSpPr/>
           <p:nvPr/>
         </p:nvSpPr>
@@ -15067,7 +15138,232 @@
       </p:sp>
       <p:sp>
         <p:nvSpPr>
-          <p:cNvPr id="38" name="TextBox 37"/>
+          <p:cNvPr id="38" name="Rounded Rectangle 37"/>
+          <p:cNvSpPr/>
+          <p:nvPr/>
+        </p:nvSpPr>
+        <p:spPr>
+          <a:xfrm>
+            <a:off x="1143000" y="6343650"/>
+            <a:ext cx="3482340" cy="647700"/>
+          </a:xfrm>
+          <a:prstGeom prst="roundRect">
+            <a:avLst>
+              <a:gd name="adj" fmla="val 5882"/>
+            </a:avLst>
+          </a:prstGeom>
+          <a:solidFill>
+            <a:srgbClr val="EDF3FD"/>
+          </a:solidFill>
+          <a:ln w="9525">
+            <a:solidFill>
+              <a:srgbClr val="BFD3F5"/>
+            </a:solidFill>
+          </a:ln>
+          <a:effectLst/>
+        </p:spPr>
+        <p:txBody>
+          <a:bodyPr rtlCol="0" anchor="ctr" wrap="square"/>
+          <a:lstStyle/>
+          <a:p>
+            <a:pPr algn="ctr"/>
+          </a:p>
+        </p:txBody>
+      </p:sp>
+      <p:sp>
+        <p:nvSpPr>
+          <p:cNvPr id="39" name="TextBox 38"/>
+          <p:cNvSpPr txBox="1"/>
+          <p:nvPr/>
+        </p:nvSpPr>
+        <p:spPr>
+          <a:xfrm>
+            <a:off x="1238250" y="6343650"/>
+            <a:ext cx="3291840" cy="647700"/>
+          </a:xfrm>
+          <a:prstGeom prst="rect">
+            <a:avLst/>
+          </a:prstGeom>
+          <a:noFill/>
+        </p:spPr>
+        <p:txBody>
+          <a:bodyPr wrap="square" lIns="0" rIns="0" tIns="0" bIns="0" anchor="ctr">
+            <a:spAutoFit/>
+          </a:bodyPr>
+          <a:lstStyle/>
+          <a:p>
+            <a:pPr algn="l">
+              <a:lnSpc>
+                <a:spcPct val="115000"/>
+              </a:lnSpc>
+            </a:pPr>
+            <a:r>
+              <a:rPr sz="1875" b="1">
+                <a:solidFill>
+                  <a:srgbClr val="0D2B5E"/>
+                </a:solidFill>
+                <a:latin typeface="Pretendard"/>
+                <a:ea typeface="Pretendard"/>
+                <a:cs typeface="Pretendard"/>
+              </a:rPr>
+              <a:t>부품</a:t>
+            </a:r>
+          </a:p>
+        </p:txBody>
+      </p:sp>
+      <p:sp>
+        <p:nvSpPr>
+          <p:cNvPr id="40" name="Rounded Rectangle 39"/>
+          <p:cNvSpPr/>
+          <p:nvPr/>
+        </p:nvSpPr>
+        <p:spPr>
+          <a:xfrm>
+            <a:off x="4663440" y="6343650"/>
+            <a:ext cx="6202680" cy="647700"/>
+          </a:xfrm>
+          <a:prstGeom prst="roundRect">
+            <a:avLst>
+              <a:gd name="adj" fmla="val 5882"/>
+            </a:avLst>
+          </a:prstGeom>
+          <a:solidFill>
+            <a:srgbClr val="FAFBFD"/>
+          </a:solidFill>
+          <a:ln w="9525">
+            <a:solidFill>
+              <a:srgbClr val="DCE1E8"/>
+            </a:solidFill>
+          </a:ln>
+          <a:effectLst/>
+        </p:spPr>
+        <p:txBody>
+          <a:bodyPr rtlCol="0" anchor="ctr" wrap="square"/>
+          <a:lstStyle/>
+          <a:p>
+            <a:pPr algn="ctr"/>
+          </a:p>
+        </p:txBody>
+      </p:sp>
+      <p:sp>
+        <p:nvSpPr>
+          <p:cNvPr id="41" name="TextBox 40"/>
+          <p:cNvSpPr txBox="1"/>
+          <p:nvPr/>
+        </p:nvSpPr>
+        <p:spPr>
+          <a:xfrm>
+            <a:off x="4758690" y="6343650"/>
+            <a:ext cx="6012180" cy="647700"/>
+          </a:xfrm>
+          <a:prstGeom prst="rect">
+            <a:avLst/>
+          </a:prstGeom>
+          <a:noFill/>
+        </p:spPr>
+        <p:txBody>
+          <a:bodyPr wrap="square" lIns="0" rIns="0" tIns="0" bIns="0" anchor="ctr">
+            <a:spAutoFit/>
+          </a:bodyPr>
+          <a:lstStyle/>
+          <a:p>
+            <a:pPr algn="ctr">
+              <a:lnSpc>
+                <a:spcPct val="115000"/>
+              </a:lnSpc>
+            </a:pPr>
+            <a:r>
+              <a:rPr sz="1875" b="0">
+                <a:solidFill>
+                  <a:srgbClr val="3D3D3D"/>
+                </a:solidFill>
+                <a:latin typeface="Pretendard"/>
+                <a:ea typeface="Pretendard"/>
+                <a:cs typeface="Pretendard"/>
+              </a:rPr>
+              <a:t>hadoop-aws(이미지에 없음)</a:t>
+            </a:r>
+          </a:p>
+        </p:txBody>
+      </p:sp>
+      <p:sp>
+        <p:nvSpPr>
+          <p:cNvPr id="42" name="Rounded Rectangle 41"/>
+          <p:cNvSpPr/>
+          <p:nvPr/>
+        </p:nvSpPr>
+        <p:spPr>
+          <a:xfrm>
+            <a:off x="10904220" y="6343650"/>
+            <a:ext cx="6240780" cy="647700"/>
+          </a:xfrm>
+          <a:prstGeom prst="roundRect">
+            <a:avLst>
+              <a:gd name="adj" fmla="val 5882"/>
+            </a:avLst>
+          </a:prstGeom>
+          <a:solidFill>
+            <a:srgbClr val="FAFBFD"/>
+          </a:solidFill>
+          <a:ln w="9525">
+            <a:solidFill>
+              <a:srgbClr val="DCE1E8"/>
+            </a:solidFill>
+          </a:ln>
+          <a:effectLst/>
+        </p:spPr>
+        <p:txBody>
+          <a:bodyPr rtlCol="0" anchor="ctr" wrap="square"/>
+          <a:lstStyle/>
+          <a:p>
+            <a:pPr algn="ctr"/>
+          </a:p>
+        </p:txBody>
+      </p:sp>
+      <p:sp>
+        <p:nvSpPr>
+          <p:cNvPr id="43" name="TextBox 42"/>
+          <p:cNvSpPr txBox="1"/>
+          <p:nvPr/>
+        </p:nvSpPr>
+        <p:spPr>
+          <a:xfrm>
+            <a:off x="10999470" y="6343650"/>
+            <a:ext cx="6050280" cy="647700"/>
+          </a:xfrm>
+          <a:prstGeom prst="rect">
+            <a:avLst/>
+          </a:prstGeom>
+          <a:noFill/>
+        </p:spPr>
+        <p:txBody>
+          <a:bodyPr wrap="square" lIns="0" rIns="0" tIns="0" bIns="0" anchor="ctr">
+            <a:spAutoFit/>
+          </a:bodyPr>
+          <a:lstStyle/>
+          <a:p>
+            <a:pPr algn="ctr">
+              <a:lnSpc>
+                <a:spcPct val="115000"/>
+              </a:lnSpc>
+            </a:pPr>
+            <a:r>
+              <a:rPr sz="1875" b="0">
+                <a:solidFill>
+                  <a:srgbClr val="3D3D3D"/>
+                </a:solidFill>
+                <a:latin typeface="Pretendard"/>
+                <a:ea typeface="Pretendard"/>
+                <a:cs typeface="Pretendard"/>
+              </a:rPr>
+              <a:t>iceberg-aws-bundle(있음)</a:t>
+            </a:r>
+          </a:p>
+        </p:txBody>
+      </p:sp>
+      <p:sp>
+        <p:nvSpPr>
+          <p:cNvPr id="44" name="TextBox 43"/>
           <p:cNvSpPr txBox="1"/>
           <p:nvPr/>
         </p:nvSpPr>
@@ -15101,14 +15397,14 @@
                 <a:ea typeface="Pretendard"/>
                 <a:cs typeface="Pretendard"/>
               </a:rPr>
-              <a:t>「4-2 에서 Iceberg 엔 잘 썼는데 CSV 읽기만 403」이 이 차이 — 그래서 spark-submit 에 --conf 를 네 개 붙인다</a:t>
-            </a:r>
-          </a:p>
-        </p:txBody>
-      </p:sp>
-      <p:sp>
-        <p:nvSpPr>
-          <p:cNvPr id="39" name="Rectangle 38"/>
+              <a:t>카탈로그 설정이 있어도 s3a 는 따로 — 그래서 --packages 하나(부품)와 --conf 네 개(MinIO 주소·계정)를 붙인다</a:t>
+            </a:r>
+          </a:p>
+        </p:txBody>
+      </p:sp>
+      <p:sp>
+        <p:nvSpPr>
+          <p:cNvPr id="45" name="Rectangle 44"/>
           <p:cNvSpPr/>
           <p:nvPr/>
         </p:nvSpPr>
@@ -15138,7 +15434,7 @@
       </p:sp>
       <p:sp>
         <p:nvSpPr>
-          <p:cNvPr id="40" name="TextBox 39"/>
+          <p:cNvPr id="46" name="TextBox 45"/>
           <p:cNvSpPr txBox="1"/>
           <p:nvPr/>
         </p:nvSpPr>
@@ -15179,7 +15475,7 @@
       </p:sp>
       <p:sp>
         <p:nvSpPr>
-          <p:cNvPr id="41" name="TextBox 40"/>
+          <p:cNvPr id="47" name="TextBox 46"/>
           <p:cNvSpPr txBox="1"/>
           <p:nvPr/>
         </p:nvSpPr>
